--- a/제안서/Tech_TOP10_스마트액티브레버리지15_v1_20260812.pptx
+++ b/제안서/Tech_TOP10_스마트액티브레버리지15_v1_20260812.pptx
@@ -23469,7 +23469,7 @@
                   <a:srgbClr val="222222"/>
                 </a:solidFill>
               </a:rPr>
-              <a:t>'일별 수익률의 1.5배'를 매일 다시 맞추는 것이 아니라, '평균 1.5배' 노출을 유지하며 큰 변동에만 재조정하는 레버리지 운용 방식입니다.</a:t>
+              <a:t>'평균 1.5배' 노출을 유지하면서, 오르면 팔고 내리면 사는 운용으로 기존 레버리지의 변동성 잠식을 없애는 방식입니다.</a:t>
             </a:r>
           </a:p>
         </p:txBody>
@@ -23482,7 +23482,7 @@
         </p:nvSpPr>
         <p:spPr>
           <a:xfrm>
-            <a:off x="731520" y="1828800"/>
+            <a:off x="731520" y="1691640"/>
             <a:ext cx="8351520" cy="320040"/>
           </a:xfrm>
           <a:prstGeom prst="rect">
@@ -23521,7 +23521,7 @@
         </p:nvSpPr>
         <p:spPr>
           <a:xfrm>
-            <a:off x="731520" y="2212848"/>
+            <a:off x="731520" y="2075688"/>
             <a:ext cx="8351520" cy="822960"/>
           </a:xfrm>
           <a:prstGeom prst="rect">
@@ -23559,7 +23559,7 @@
         </p:nvSpPr>
         <p:spPr>
           <a:xfrm>
-            <a:off x="731520" y="3154680"/>
+            <a:off x="731520" y="2697480"/>
             <a:ext cx="8351520" cy="320040"/>
           </a:xfrm>
           <a:prstGeom prst="rect">
@@ -23585,7 +23585,7 @@
                 </a:solidFill>
                 <a:latin typeface="KoPub돋움체_Pro Bold"/>
               </a:rPr>
-              <a:t>② 오르면 줄고, 내리면 늘어난다</a:t>
+              <a:t>② 오르면 매도, 내리면 매수</a:t>
             </a:r>
           </a:p>
         </p:txBody>
@@ -23598,7 +23598,7 @@
         </p:nvSpPr>
         <p:spPr>
           <a:xfrm>
-            <a:off x="731520" y="3538728"/>
+            <a:off x="731520" y="3081528"/>
             <a:ext cx="8351520" cy="822960"/>
           </a:xfrm>
           <a:prstGeom prst="rect">
@@ -23623,21 +23623,45 @@
                   <a:srgbClr val="222222"/>
                 </a:solidFill>
               </a:rPr>
-              <a:t>노출을 그대로 두면 상승 시 레버리지율이 자연히 낮아지고(이익 확정 효과), 하락 시 높아집니다(저가 노출 확대). 이 성질을 억지로 되돌리지 않고 활용합니다.</a:t>
-            </a:r>
-          </a:p>
-        </p:txBody>
-      </p:sp>
-      <p:sp>
-        <p:nvSpPr>
-          <p:cNvPr id="8" name="TextBox 7"/>
+              <a:t>기존 레버리지 ETF는 오르면 사고 내리면 파는 일일 재조정으로 왕복 구간마다 손실이 쌓입니다. 스마트 레버리지는 반대로 상승 시 매도(이익 실현), 하락 시 매수(저가 매수)를 하여 변동성 잠식 효과를 없앱니다.</a:t>
+            </a:r>
+          </a:p>
+        </p:txBody>
+      </p:sp>
+      <p:pic>
+        <p:nvPicPr>
+          <p:cNvPr id="8" name="Picture 7" descr="lev15_concept.png"/>
+          <p:cNvPicPr>
+            <a:picLocks noChangeAspect="1"/>
+          </p:cNvPicPr>
+          <p:nvPr/>
+        </p:nvPicPr>
+        <p:blipFill>
+          <a:blip r:embed="rId3"/>
+          <a:stretch>
+            <a:fillRect/>
+          </a:stretch>
+        </p:blipFill>
+        <p:spPr>
+          <a:xfrm>
+            <a:off x="594360" y="3977639"/>
+            <a:ext cx="8732520" cy="2482775"/>
+          </a:xfrm>
+          <a:prstGeom prst="rect">
+            <a:avLst/>
+          </a:prstGeom>
+        </p:spPr>
+      </p:pic>
+      <p:sp>
+        <p:nvSpPr>
+          <p:cNvPr id="9" name="TextBox 8"/>
           <p:cNvSpPr txBox="1"/>
           <p:nvPr/>
         </p:nvSpPr>
         <p:spPr>
           <a:xfrm>
-            <a:off x="731520" y="4480560"/>
-            <a:ext cx="8351520" cy="320040"/>
+            <a:off x="502920" y="6291072"/>
+            <a:ext cx="8900160" cy="365760"/>
           </a:xfrm>
           <a:prstGeom prst="rect">
             <a:avLst/>
@@ -23656,129 +23680,13 @@
               </a:lnSpc>
             </a:pPr>
             <a:r>
-              <a:rPr sz="1500" b="1">
-                <a:solidFill>
-                  <a:srgbClr val="043B72"/>
-                </a:solidFill>
-                <a:latin typeface="KoPub돋움체_Pro Bold"/>
-              </a:rPr>
-              <a:t>③ 재조정 최소화</a:t>
-            </a:r>
-          </a:p>
-        </p:txBody>
-      </p:sp>
-      <p:sp>
-        <p:nvSpPr>
-          <p:cNvPr id="9" name="TextBox 8"/>
-          <p:cNvSpPr txBox="1"/>
-          <p:nvPr/>
-        </p:nvSpPr>
-        <p:spPr>
-          <a:xfrm>
-            <a:off x="731520" y="4864608"/>
-            <a:ext cx="8351520" cy="822960"/>
-          </a:xfrm>
-          <a:prstGeom prst="rect">
-            <a:avLst/>
-          </a:prstGeom>
-          <a:noFill/>
-        </p:spPr>
-        <p:txBody>
-          <a:bodyPr wrap="square">
-            <a:spAutoFit/>
-          </a:bodyPr>
-          <a:lstStyle/>
-          <a:p>
-            <a:pPr>
-              <a:lnSpc>
-                <a:spcPct val="125000"/>
-              </a:lnSpc>
-            </a:pPr>
-            <a:r>
-              <a:rPr sz="1200">
-                <a:solidFill>
-                  <a:srgbClr val="222222"/>
-                </a:solidFill>
-              </a:rPr>
-              <a:t>기준에서 크게 벗어날 때만 재조정합니다. 백테스트에서 일일 재조정 1,221회가 17회로 줄었습니다 (2021.08~2026.08).</a:t>
-            </a:r>
-          </a:p>
-        </p:txBody>
-      </p:sp>
-      <p:sp>
-        <p:nvSpPr>
-          <p:cNvPr id="10" name="TextBox 9"/>
-          <p:cNvSpPr txBox="1"/>
-          <p:nvPr/>
-        </p:nvSpPr>
-        <p:spPr>
-          <a:xfrm>
-            <a:off x="731520" y="5440680"/>
-            <a:ext cx="8351520" cy="457200"/>
-          </a:xfrm>
-          <a:prstGeom prst="rect">
-            <a:avLst/>
-          </a:prstGeom>
-          <a:noFill/>
-        </p:spPr>
-        <p:txBody>
-          <a:bodyPr wrap="square">
-            <a:spAutoFit/>
-          </a:bodyPr>
-          <a:lstStyle/>
-          <a:p>
-            <a:pPr>
-              <a:lnSpc>
-                <a:spcPct val="115000"/>
-              </a:lnSpc>
-            </a:pPr>
-            <a:r>
-              <a:rPr sz="1400" b="1">
-                <a:solidFill>
-                  <a:srgbClr val="E8720C"/>
-                </a:solidFill>
-                <a:latin typeface="KoPub돋움체_Pro Bold"/>
-              </a:rPr>
-              <a:t>레버리지의 기대수익은 지키고, 일일 재조정의 비용과 시장 영향은 덜어냅니다.</a:t>
-            </a:r>
-          </a:p>
-        </p:txBody>
-      </p:sp>
-      <p:sp>
-        <p:nvSpPr>
-          <p:cNvPr id="11" name="TextBox 10"/>
-          <p:cNvSpPr txBox="1"/>
-          <p:nvPr/>
-        </p:nvSpPr>
-        <p:spPr>
-          <a:xfrm>
-            <a:off x="502920" y="6291072"/>
-            <a:ext cx="8900160" cy="365760"/>
-          </a:xfrm>
-          <a:prstGeom prst="rect">
-            <a:avLst/>
-          </a:prstGeom>
-          <a:noFill/>
-        </p:spPr>
-        <p:txBody>
-          <a:bodyPr wrap="square">
-            <a:spAutoFit/>
-          </a:bodyPr>
-          <a:lstStyle/>
-          <a:p>
-            <a:pPr>
-              <a:lnSpc>
-                <a:spcPct val="115000"/>
-              </a:lnSpc>
-            </a:pPr>
-            <a:r>
               <a:rPr sz="800" b="0">
                 <a:solidFill>
                   <a:srgbClr val="84888B"/>
                 </a:solidFill>
                 <a:latin typeface="KoPub돋움체_Pro Medium"/>
               </a:rPr>
-              <a:t>※ 상기 자료는 이해를 돕기 위한 예시이며, 시뮬레이션은 가정에 따른 것으로 실제 투자내용·성과와 다를 수 있습니다. 레버리지 상품은 원금 손실 위험이 큽니다.</a:t>
+              <a:t>※ 상기 자료는 이해를 돕기 위한 개념 예시이며, 시뮬레이션·운용은 가정과 시장 상황에 따라 달라질 수 있습니다. 레버리지 상품은 원금 손실 위험이 큽니다.</a:t>
             </a:r>
           </a:p>
         </p:txBody>

--- a/제안서/Tech_TOP10_스마트액티브레버리지15_v1_20260812.pptx
+++ b/제안서/Tech_TOP10_스마트액티브레버리지15_v1_20260812.pptx
@@ -23546,7 +23546,7 @@
                   <a:srgbClr val="222222"/>
                 </a:solidFill>
               </a:rPr>
-              <a:t>기준 레버리지는 1.5배. 노출이 목표 범위 안에 있으면 매매하지 않습니다 — 레버리지의 기대수익은 그대로 가져갑니다.</a:t>
+              <a:t>기준 레버리지는 1.5배이며, 편입비는 최소 100% ~ 최대 200% 범위에서 유지합니다. 노출이 범위 안에 있으면 매매하지 않아 레버리지의 기대수익은 그대로 가져갑니다.</a:t>
             </a:r>
           </a:p>
         </p:txBody>
@@ -23761,7 +23761,7 @@
                 </a:solidFill>
                 <a:latin typeface="KoPub돋움체_Pro Bold"/>
               </a:rPr>
-              <a:t>1. 스마트 레버리지란 : 일일 재조정의 반대편에 선다</a:t>
+              <a:t>1. 스마트 레버리지란 : 국면별 — 기존 레버리지와 무엇이 다른가</a:t>
             </a:r>
           </a:p>
         </p:txBody>
@@ -23799,21 +23799,45 @@
                   <a:srgbClr val="222222"/>
                 </a:solidFill>
               </a:rPr>
-              <a:t>일반 레버리지 ETF는 매일 장 마감에 배수를 다시 맞춥니다 — 오르면 사고 내리면 파는 추세 순응 매매입니다. 스마트 레버리지는 그 반대편에 섭니다.</a:t>
+              <a:t>한 방향으로 강하게 지속되는 추세장에서는 매일 배수를 유지하는 기존 레버리지가 유리합니다. 반면 변동성이 크고 출렁이며 오르는 장에서는 고가 매도·저가 매수가 작동하는 스마트 레버리지가 유리합니다 — KOSPI 실측으로 비교했습니다.</a:t>
             </a:r>
           </a:p>
         </p:txBody>
       </p:sp>
-      <p:sp>
-        <p:nvSpPr>
-          <p:cNvPr id="4" name="TextBox 3"/>
+      <p:pic>
+        <p:nvPicPr>
+          <p:cNvPr id="4" name="Picture 3" descr="lev15_regime.png"/>
+          <p:cNvPicPr>
+            <a:picLocks noChangeAspect="1"/>
+          </p:cNvPicPr>
+          <p:nvPr/>
+        </p:nvPicPr>
+        <p:blipFill>
+          <a:blip r:embed="rId4"/>
+          <a:stretch>
+            <a:fillRect/>
+          </a:stretch>
+        </p:blipFill>
+        <p:spPr>
+          <a:xfrm>
+            <a:off x="411480" y="1874519"/>
+            <a:ext cx="9098280" cy="2974438"/>
+          </a:xfrm>
+          <a:prstGeom prst="rect">
+            <a:avLst/>
+          </a:prstGeom>
+        </p:spPr>
+      </p:pic>
+      <p:sp>
+        <p:nvSpPr>
+          <p:cNvPr id="5" name="TextBox 4"/>
           <p:cNvSpPr txBox="1"/>
           <p:nvPr/>
         </p:nvSpPr>
         <p:spPr>
           <a:xfrm>
-            <a:off x="731520" y="1828800"/>
-            <a:ext cx="8351520" cy="320040"/>
+            <a:off x="731520" y="5257800"/>
+            <a:ext cx="8351520" cy="457200"/>
           </a:xfrm>
           <a:prstGeom prst="rect">
             <a:avLst/>
@@ -23832,27 +23856,27 @@
               </a:lnSpc>
             </a:pPr>
             <a:r>
-              <a:rPr sz="1500" b="1">
-                <a:solidFill>
-                  <a:srgbClr val="043B72"/>
+              <a:rPr sz="1400" b="1">
+                <a:solidFill>
+                  <a:srgbClr val="E8720C"/>
                 </a:solidFill>
                 <a:latin typeface="KoPub돋움체_Pro Bold"/>
               </a:rPr>
-              <a:t>일일 재조정 레버리지 (일반 ETF)</a:t>
+              <a:t>어느 한쪽이 항상 이기는 방식은 없습니다 — 최근처럼 변동성이 큰 시장일수록 스마트 방식의 강점이 커집니다.</a:t>
             </a:r>
           </a:p>
         </p:txBody>
       </p:sp>
       <p:sp>
         <p:nvSpPr>
-          <p:cNvPr id="5" name="TextBox 4"/>
+          <p:cNvPr id="6" name="TextBox 5"/>
           <p:cNvSpPr txBox="1"/>
           <p:nvPr/>
         </p:nvSpPr>
         <p:spPr>
           <a:xfrm>
-            <a:off x="731520" y="2212848"/>
-            <a:ext cx="8351520" cy="822960"/>
+            <a:off x="502920" y="6291072"/>
+            <a:ext cx="8900160" cy="365760"/>
           </a:xfrm>
           <a:prstGeom prst="rect">
             <a:avLst/>
@@ -23867,248 +23891,17 @@
           <a:p>
             <a:pPr>
               <a:lnSpc>
-                <a:spcPct val="125000"/>
-              </a:lnSpc>
-            </a:pPr>
-            <a:r>
-              <a:rPr sz="1200">
-                <a:solidFill>
-                  <a:srgbClr val="222222"/>
-                </a:solidFill>
-              </a:rPr>
-              <a:t>시장 +10% → 노출 부족 → 고가 매수 / 시장 -10% → 노출 초과 → 저가 매도. 왕복하면 반드시 잃습니다. 변동성이 큰 날은 수천억 원이 장 마감에 같은 방향으로 나가며 시장을 흔들고, 그 비용은 투자자가 부담합니다.</a:t>
-            </a:r>
-          </a:p>
-        </p:txBody>
-      </p:sp>
-      <p:sp>
-        <p:nvSpPr>
-          <p:cNvPr id="6" name="TextBox 5"/>
-          <p:cNvSpPr txBox="1"/>
-          <p:nvPr/>
-        </p:nvSpPr>
-        <p:spPr>
-          <a:xfrm>
-            <a:off x="731520" y="3154680"/>
-            <a:ext cx="8351520" cy="320040"/>
-          </a:xfrm>
-          <a:prstGeom prst="rect">
-            <a:avLst/>
-          </a:prstGeom>
-          <a:noFill/>
-        </p:spPr>
-        <p:txBody>
-          <a:bodyPr wrap="square">
-            <a:spAutoFit/>
-          </a:bodyPr>
-          <a:lstStyle/>
-          <a:p>
-            <a:pPr>
-              <a:lnSpc>
                 <a:spcPct val="115000"/>
               </a:lnSpc>
             </a:pPr>
             <a:r>
-              <a:rPr sz="1500" b="1">
-                <a:solidFill>
-                  <a:srgbClr val="043B72"/>
-                </a:solidFill>
-                <a:latin typeface="KoPub돋움체_Pro Bold"/>
-              </a:rPr>
-              <a:t>스마트 레버리지 1.5</a:t>
-            </a:r>
-          </a:p>
-        </p:txBody>
-      </p:sp>
-      <p:sp>
-        <p:nvSpPr>
-          <p:cNvPr id="7" name="TextBox 6"/>
-          <p:cNvSpPr txBox="1"/>
-          <p:nvPr/>
-        </p:nvSpPr>
-        <p:spPr>
-          <a:xfrm>
-            <a:off x="731520" y="3538728"/>
-            <a:ext cx="8351520" cy="822960"/>
-          </a:xfrm>
-          <a:prstGeom prst="rect">
-            <a:avLst/>
-          </a:prstGeom>
-          <a:noFill/>
-        </p:spPr>
-        <p:txBody>
-          <a:bodyPr wrap="square">
-            <a:spAutoFit/>
-          </a:bodyPr>
-          <a:lstStyle/>
-          <a:p>
-            <a:pPr>
-              <a:lnSpc>
-                <a:spcPct val="125000"/>
-              </a:lnSpc>
-            </a:pPr>
-            <a:r>
-              <a:rPr sz="1200">
-                <a:solidFill>
-                  <a:srgbClr val="222222"/>
-                </a:solidFill>
-              </a:rPr>
-              <a:t>상승하면 레버리지율이 자연히 낮아지고(이익 확정 효과), 하락하면 높아집니다(저가 노출 확대). 억지로 되돌리지 않습니다.</a:t>
-            </a:r>
-          </a:p>
-        </p:txBody>
-      </p:sp>
-      <p:sp>
-        <p:nvSpPr>
-          <p:cNvPr id="8" name="TextBox 7"/>
-          <p:cNvSpPr txBox="1"/>
-          <p:nvPr/>
-        </p:nvSpPr>
-        <p:spPr>
-          <a:xfrm>
-            <a:off x="731520" y="4480560"/>
-            <a:ext cx="8351520" cy="320040"/>
-          </a:xfrm>
-          <a:prstGeom prst="rect">
-            <a:avLst/>
-          </a:prstGeom>
-          <a:noFill/>
-        </p:spPr>
-        <p:txBody>
-          <a:bodyPr wrap="square">
-            <a:spAutoFit/>
-          </a:bodyPr>
-          <a:lstStyle/>
-          <a:p>
-            <a:pPr>
-              <a:lnSpc>
-                <a:spcPct val="115000"/>
-              </a:lnSpc>
-            </a:pPr>
-            <a:r>
-              <a:rPr sz="1500" b="1">
-                <a:solidFill>
-                  <a:srgbClr val="043B72"/>
-                </a:solidFill>
-                <a:latin typeface="KoPub돋움체_Pro Bold"/>
-              </a:rPr>
-              <a:t>큰 변동에만 대응</a:t>
-            </a:r>
-          </a:p>
-        </p:txBody>
-      </p:sp>
-      <p:sp>
-        <p:nvSpPr>
-          <p:cNvPr id="9" name="TextBox 8"/>
-          <p:cNvSpPr txBox="1"/>
-          <p:nvPr/>
-        </p:nvSpPr>
-        <p:spPr>
-          <a:xfrm>
-            <a:off x="731520" y="4864608"/>
-            <a:ext cx="8351520" cy="822960"/>
-          </a:xfrm>
-          <a:prstGeom prst="rect">
-            <a:avLst/>
-          </a:prstGeom>
-          <a:noFill/>
-        </p:spPr>
-        <p:txBody>
-          <a:bodyPr wrap="square">
-            <a:spAutoFit/>
-          </a:bodyPr>
-          <a:lstStyle/>
-          <a:p>
-            <a:pPr>
-              <a:lnSpc>
-                <a:spcPct val="125000"/>
-              </a:lnSpc>
-            </a:pPr>
-            <a:r>
-              <a:rPr sz="1200">
-                <a:solidFill>
-                  <a:srgbClr val="222222"/>
-                </a:solidFill>
-              </a:rPr>
-              <a:t>평균 1.5배에서 크게 벗어날 때만 재조정합니다. 잔변동에는 반응하지 않아 비용과 시장 영향이 최소화됩니다.</a:t>
-            </a:r>
-          </a:p>
-        </p:txBody>
-      </p:sp>
-      <p:sp>
-        <p:nvSpPr>
-          <p:cNvPr id="10" name="TextBox 9"/>
-          <p:cNvSpPr txBox="1"/>
-          <p:nvPr/>
-        </p:nvSpPr>
-        <p:spPr>
-          <a:xfrm>
-            <a:off x="731520" y="5440680"/>
-            <a:ext cx="8351520" cy="457200"/>
-          </a:xfrm>
-          <a:prstGeom prst="rect">
-            <a:avLst/>
-          </a:prstGeom>
-          <a:noFill/>
-        </p:spPr>
-        <p:txBody>
-          <a:bodyPr wrap="square">
-            <a:spAutoFit/>
-          </a:bodyPr>
-          <a:lstStyle/>
-          <a:p>
-            <a:pPr>
-              <a:lnSpc>
-                <a:spcPct val="115000"/>
-              </a:lnSpc>
-            </a:pPr>
-            <a:r>
-              <a:rPr sz="1400" b="1">
-                <a:solidFill>
-                  <a:srgbClr val="E8720C"/>
-                </a:solidFill>
-                <a:latin typeface="KoPub돋움체_Pro Bold"/>
-              </a:rPr>
-              <a:t>오르면 줄이고, 내리면 늘린다 — 재조정의 방향을 뒤집습니다.</a:t>
-            </a:r>
-          </a:p>
-        </p:txBody>
-      </p:sp>
-      <p:sp>
-        <p:nvSpPr>
-          <p:cNvPr id="11" name="TextBox 10"/>
-          <p:cNvSpPr txBox="1"/>
-          <p:nvPr/>
-        </p:nvSpPr>
-        <p:spPr>
-          <a:xfrm>
-            <a:off x="502920" y="6291072"/>
-            <a:ext cx="8900160" cy="365760"/>
-          </a:xfrm>
-          <a:prstGeom prst="rect">
-            <a:avLst/>
-          </a:prstGeom>
-          <a:noFill/>
-        </p:spPr>
-        <p:txBody>
-          <a:bodyPr wrap="square">
-            <a:spAutoFit/>
-          </a:bodyPr>
-          <a:lstStyle/>
-          <a:p>
-            <a:pPr>
-              <a:lnSpc>
-                <a:spcPct val="115000"/>
-              </a:lnSpc>
-            </a:pPr>
-            <a:r>
               <a:rPr sz="800" b="0">
                 <a:solidFill>
                   <a:srgbClr val="84888B"/>
                 </a:solidFill>
                 <a:latin typeface="KoPub돋움체_Pro Medium"/>
               </a:rPr>
-              <a:t>※ 상기 자료는 이해를 돕기 위한 예시이며, 시뮬레이션은 가정에 따른 것으로 실제 투자내용·성과와 다를 수 있습니다. 레버리지 상품은 원금 손실 위험이 큽니다.</a:t>
+              <a:t>※ KOSPI 종가지수 실측(DataGuide, ~2026.08.26) 기반 개념 시뮬레이션 · 기존 = 일간 1.5배 매일 재조정 · 스마트 = 편입비 100~200% 범위 내 운용 가정 · 거래비용 미반영 · 상기 자료는 이해를 돕기 위한 예시이며 실제 성과와 다를 수 있습니다.</a:t>
             </a:r>
           </a:p>
         </p:txBody>

--- a/제안서/Tech_TOP10_스마트액티브레버리지15_v1_20260812.pptx
+++ b/제안서/Tech_TOP10_스마트액티브레버리지15_v1_20260812.pptx
@@ -24019,9 +24019,87 @@
           </a:p>
         </p:txBody>
       </p:sp>
+      <p:sp>
+        <p:nvSpPr>
+          <p:cNvPr id="6" name="TextBox 5"/>
+          <p:cNvSpPr txBox="1"/>
+          <p:nvPr/>
+        </p:nvSpPr>
+        <p:spPr>
+          <a:xfrm>
+            <a:off x="731520" y="5440680"/>
+            <a:ext cx="8351520" cy="457200"/>
+          </a:xfrm>
+          <a:prstGeom prst="rect">
+            <a:avLst/>
+          </a:prstGeom>
+          <a:noFill/>
+        </p:spPr>
+        <p:txBody>
+          <a:bodyPr wrap="square">
+            <a:spAutoFit/>
+          </a:bodyPr>
+          <a:lstStyle/>
+          <a:p>
+            <a:pPr>
+              <a:lnSpc>
+                <a:spcPct val="115000"/>
+              </a:lnSpc>
+            </a:pPr>
+            <a:r>
+              <a:rPr sz="1400" b="1">
+                <a:solidFill>
+                  <a:srgbClr val="E8720C"/>
+                </a:solidFill>
+                <a:latin typeface="KoPub돋움체_Pro Bold"/>
+              </a:rPr>
+              <a:t>방향이 아니라 '경로'가 성과를 결정합니다 — 왕복 구간에서는 지수가 제자리여도 손실이 쌓입니다.</a:t>
+            </a:r>
+          </a:p>
+        </p:txBody>
+      </p:sp>
+      <p:sp>
+        <p:nvSpPr>
+          <p:cNvPr id="7" name="TextBox 6"/>
+          <p:cNvSpPr txBox="1"/>
+          <p:nvPr/>
+        </p:nvSpPr>
+        <p:spPr>
+          <a:xfrm>
+            <a:off x="502920" y="6291072"/>
+            <a:ext cx="8900160" cy="365760"/>
+          </a:xfrm>
+          <a:prstGeom prst="rect">
+            <a:avLst/>
+          </a:prstGeom>
+          <a:noFill/>
+        </p:spPr>
+        <p:txBody>
+          <a:bodyPr wrap="square">
+            <a:spAutoFit/>
+          </a:bodyPr>
+          <a:lstStyle/>
+          <a:p>
+            <a:pPr>
+              <a:lnSpc>
+                <a:spcPct val="115000"/>
+              </a:lnSpc>
+            </a:pPr>
+            <a:r>
+              <a:rPr sz="800" b="0">
+                <a:solidFill>
+                  <a:srgbClr val="84888B"/>
+                </a:solidFill>
+                <a:latin typeface="KoPub돋움체_Pro Medium"/>
+              </a:rPr>
+              <a:t>※ ***** 200·***** 레버리지 수정주가 실측 (제자리 사례 2026.02.26~04.16) · '시장 2배 후 제자리 = 0'과 '하루 +10% 후 제자리 = -1.8%'는 2배 레버리지 산술 · 데이터: ETF데이터</a:t>
+            </a:r>
+          </a:p>
+        </p:txBody>
+      </p:sp>
       <p:pic>
         <p:nvPicPr>
-          <p:cNvPr id="4" name="Picture 3" descr="image.png"/>
+          <p:cNvPr id="8" name="Picture 7" descr="image.png"/>
           <p:cNvPicPr>
             <a:picLocks noChangeAspect="1"/>
           </p:cNvPicPr>
@@ -24045,14 +24123,14 @@
       </p:pic>
       <p:pic>
         <p:nvPicPr>
-          <p:cNvPr id="5" name="Picture 4" descr="image.png"/>
+          <p:cNvPr id="9" name="Picture 8" descr="lev15_k200flat.png"/>
           <p:cNvPicPr>
             <a:picLocks noChangeAspect="1"/>
           </p:cNvPicPr>
           <p:nvPr/>
         </p:nvPicPr>
         <p:blipFill>
-          <a:blip r:embed="rId7"/>
+          <a:blip r:embed="rId8"/>
           <a:stretch>
             <a:fillRect/>
           </a:stretch>
@@ -24067,84 +24145,6 @@
           </a:prstGeom>
         </p:spPr>
       </p:pic>
-      <p:sp>
-        <p:nvSpPr>
-          <p:cNvPr id="6" name="TextBox 5"/>
-          <p:cNvSpPr txBox="1"/>
-          <p:nvPr/>
-        </p:nvSpPr>
-        <p:spPr>
-          <a:xfrm>
-            <a:off x="731520" y="5440680"/>
-            <a:ext cx="8351520" cy="457200"/>
-          </a:xfrm>
-          <a:prstGeom prst="rect">
-            <a:avLst/>
-          </a:prstGeom>
-          <a:noFill/>
-        </p:spPr>
-        <p:txBody>
-          <a:bodyPr wrap="square">
-            <a:spAutoFit/>
-          </a:bodyPr>
-          <a:lstStyle/>
-          <a:p>
-            <a:pPr>
-              <a:lnSpc>
-                <a:spcPct val="115000"/>
-              </a:lnSpc>
-            </a:pPr>
-            <a:r>
-              <a:rPr sz="1400" b="1">
-                <a:solidFill>
-                  <a:srgbClr val="E8720C"/>
-                </a:solidFill>
-                <a:latin typeface="KoPub돋움체_Pro Bold"/>
-              </a:rPr>
-              <a:t>방향이 아니라 '경로'가 성과를 결정합니다 — 왕복 구간에서는 지수가 제자리여도 손실이 쌓입니다.</a:t>
-            </a:r>
-          </a:p>
-        </p:txBody>
-      </p:sp>
-      <p:sp>
-        <p:nvSpPr>
-          <p:cNvPr id="7" name="TextBox 6"/>
-          <p:cNvSpPr txBox="1"/>
-          <p:nvPr/>
-        </p:nvSpPr>
-        <p:spPr>
-          <a:xfrm>
-            <a:off x="502920" y="6291072"/>
-            <a:ext cx="8900160" cy="365760"/>
-          </a:xfrm>
-          <a:prstGeom prst="rect">
-            <a:avLst/>
-          </a:prstGeom>
-          <a:noFill/>
-        </p:spPr>
-        <p:txBody>
-          <a:bodyPr wrap="square">
-            <a:spAutoFit/>
-          </a:bodyPr>
-          <a:lstStyle/>
-          <a:p>
-            <a:pPr>
-              <a:lnSpc>
-                <a:spcPct val="115000"/>
-              </a:lnSpc>
-            </a:pPr>
-            <a:r>
-              <a:rPr sz="800" b="0">
-                <a:solidFill>
-                  <a:srgbClr val="84888B"/>
-                </a:solidFill>
-                <a:latin typeface="KoPub돋움체_Pro Medium"/>
-              </a:rPr>
-              <a:t>※ KODEX 200·KODEX 레버리지 수정주가 실측 (제자리 사례 2026.02.26~04.16) · '시장 2배 후 제자리 = 0'과 '하루 +10% 후 제자리 = -1.8%'는 2배 레버리지 산술 · 데이터: ETF데이터</a:t>
-            </a:r>
-          </a:p>
-        </p:txBody>
-      </p:sp>
     </p:spTree>
     <p:extLst>
       <p:ext uri="{BB962C8B-B14F-4D97-AF65-F5344CB8AC3E}">
@@ -24253,21 +24253,99 @@
                   <a:srgbClr val="222222"/>
                 </a:solidFill>
               </a:rPr>
-              <a:t>① KOSPI200이 4년 5개월 걸려 제자리로 왔을 때 레버리지는 -27.1%  ② KODEX 하이닉스 레버리지는 출시 6주 뒤 주가 보합(-1.9%)인데 -20.3%  ③ 주가 제자리(+0.3%) 왕복 5주 만에 -15.2%.</a:t>
+              <a:t>① KOSPI200이 4년 5개월 걸려 제자리로 왔을 때 레버리지는 -27.1%  ② ***** 하이닉스 레버리지는 출시 6주 뒤 주가 보합(-1.9%)인데 -20.3%  ③ 주가 제자리(+0.3%) 왕복 5주 만에 -15.2%.</a:t>
+            </a:r>
+          </a:p>
+        </p:txBody>
+      </p:sp>
+      <p:sp>
+        <p:nvSpPr>
+          <p:cNvPr id="7" name="TextBox 6"/>
+          <p:cNvSpPr txBox="1"/>
+          <p:nvPr/>
+        </p:nvSpPr>
+        <p:spPr>
+          <a:xfrm>
+            <a:off x="731520" y="5440680"/>
+            <a:ext cx="8351520" cy="457200"/>
+          </a:xfrm>
+          <a:prstGeom prst="rect">
+            <a:avLst/>
+          </a:prstGeom>
+          <a:noFill/>
+        </p:spPr>
+        <p:txBody>
+          <a:bodyPr wrap="square">
+            <a:spAutoFit/>
+          </a:bodyPr>
+          <a:lstStyle/>
+          <a:p>
+            <a:pPr>
+              <a:lnSpc>
+                <a:spcPct val="115000"/>
+              </a:lnSpc>
+            </a:pPr>
+            <a:r>
+              <a:rPr sz="1400" b="1">
+                <a:solidFill>
+                  <a:srgbClr val="E8720C"/>
+                </a:solidFill>
+                <a:latin typeface="KoPub돋움체_Pro Bold"/>
+              </a:rPr>
+              <a:t>잠식은 '왕복'에 청구되는 요금입니다 — 기간이 길수록, 변동이 클수록 요금은 커집니다.</a:t>
+            </a:r>
+          </a:p>
+        </p:txBody>
+      </p:sp>
+      <p:sp>
+        <p:nvSpPr>
+          <p:cNvPr id="8" name="TextBox 7"/>
+          <p:cNvSpPr txBox="1"/>
+          <p:nvPr/>
+        </p:nvSpPr>
+        <p:spPr>
+          <a:xfrm>
+            <a:off x="502920" y="6291072"/>
+            <a:ext cx="8900160" cy="365760"/>
+          </a:xfrm>
+          <a:prstGeom prst="rect">
+            <a:avLst/>
+          </a:prstGeom>
+          <a:noFill/>
+        </p:spPr>
+        <p:txBody>
+          <a:bodyPr wrap="square">
+            <a:spAutoFit/>
+          </a:bodyPr>
+          <a:lstStyle/>
+          <a:p>
+            <a:pPr>
+              <a:lnSpc>
+                <a:spcPct val="115000"/>
+              </a:lnSpc>
+            </a:pPr>
+            <a:r>
+              <a:rPr sz="800" b="0">
+                <a:solidFill>
+                  <a:srgbClr val="84888B"/>
+                </a:solidFill>
+                <a:latin typeface="KoPub돋움체_Pro Medium"/>
+              </a:rPr>
+              <a:t>※ 전 구간 실제값 (수정주가 기준) · ***** 200/***** 레버리지·***** SK하이닉스단일종목레버리지(2026.05.27 상장): ETF데이터 · SK하이닉스 주가: DataGuide (2026.08.14 기준) · 상기 자료는 이해를 돕기 위한 예시입니다.</a:t>
             </a:r>
           </a:p>
         </p:txBody>
       </p:sp>
       <p:pic>
         <p:nvPicPr>
-          <p:cNvPr id="4" name="Picture 3" descr="image.png"/>
+          <p:cNvPr id="9" name="Picture 8" descr="lev15_long_k200.png"/>
           <p:cNvPicPr>
             <a:picLocks noChangeAspect="1"/>
           </p:cNvPicPr>
           <p:nvPr/>
         </p:nvPicPr>
         <p:blipFill>
-          <a:blip r:embed="rId7"/>
+          <a:blip r:embed="rId10"/>
           <a:stretch>
             <a:fillRect/>
           </a:stretch>
@@ -24284,14 +24362,14 @@
       </p:pic>
       <p:pic>
         <p:nvPicPr>
-          <p:cNvPr id="5" name="Picture 4" descr="image.png"/>
+          <p:cNvPr id="10" name="Picture 9" descr="lev15_hynix_a.png"/>
           <p:cNvPicPr>
             <a:picLocks noChangeAspect="1"/>
           </p:cNvPicPr>
           <p:nvPr/>
         </p:nvPicPr>
         <p:blipFill>
-          <a:blip r:embed="rId8"/>
+          <a:blip r:embed="rId11"/>
           <a:stretch>
             <a:fillRect/>
           </a:stretch>
@@ -24308,14 +24386,14 @@
       </p:pic>
       <p:pic>
         <p:nvPicPr>
-          <p:cNvPr id="6" name="Picture 5" descr="image.png"/>
+          <p:cNvPr id="11" name="Picture 10" descr="lev15_hynix_b.png"/>
           <p:cNvPicPr>
             <a:picLocks noChangeAspect="1"/>
           </p:cNvPicPr>
           <p:nvPr/>
         </p:nvPicPr>
         <p:blipFill>
-          <a:blip r:embed="rId9"/>
+          <a:blip r:embed="rId12"/>
           <a:stretch>
             <a:fillRect/>
           </a:stretch>
@@ -24330,84 +24408,6 @@
           </a:prstGeom>
         </p:spPr>
       </p:pic>
-      <p:sp>
-        <p:nvSpPr>
-          <p:cNvPr id="7" name="TextBox 6"/>
-          <p:cNvSpPr txBox="1"/>
-          <p:nvPr/>
-        </p:nvSpPr>
-        <p:spPr>
-          <a:xfrm>
-            <a:off x="731520" y="5440680"/>
-            <a:ext cx="8351520" cy="457200"/>
-          </a:xfrm>
-          <a:prstGeom prst="rect">
-            <a:avLst/>
-          </a:prstGeom>
-          <a:noFill/>
-        </p:spPr>
-        <p:txBody>
-          <a:bodyPr wrap="square">
-            <a:spAutoFit/>
-          </a:bodyPr>
-          <a:lstStyle/>
-          <a:p>
-            <a:pPr>
-              <a:lnSpc>
-                <a:spcPct val="115000"/>
-              </a:lnSpc>
-            </a:pPr>
-            <a:r>
-              <a:rPr sz="1400" b="1">
-                <a:solidFill>
-                  <a:srgbClr val="E8720C"/>
-                </a:solidFill>
-                <a:latin typeface="KoPub돋움체_Pro Bold"/>
-              </a:rPr>
-              <a:t>잠식은 '왕복'에 청구되는 요금입니다 — 기간이 길수록, 변동이 클수록 요금은 커집니다.</a:t>
-            </a:r>
-          </a:p>
-        </p:txBody>
-      </p:sp>
-      <p:sp>
-        <p:nvSpPr>
-          <p:cNvPr id="8" name="TextBox 7"/>
-          <p:cNvSpPr txBox="1"/>
-          <p:nvPr/>
-        </p:nvSpPr>
-        <p:spPr>
-          <a:xfrm>
-            <a:off x="502920" y="6291072"/>
-            <a:ext cx="8900160" cy="365760"/>
-          </a:xfrm>
-          <a:prstGeom prst="rect">
-            <a:avLst/>
-          </a:prstGeom>
-          <a:noFill/>
-        </p:spPr>
-        <p:txBody>
-          <a:bodyPr wrap="square">
-            <a:spAutoFit/>
-          </a:bodyPr>
-          <a:lstStyle/>
-          <a:p>
-            <a:pPr>
-              <a:lnSpc>
-                <a:spcPct val="115000"/>
-              </a:lnSpc>
-            </a:pPr>
-            <a:r>
-              <a:rPr sz="800" b="0">
-                <a:solidFill>
-                  <a:srgbClr val="84888B"/>
-                </a:solidFill>
-                <a:latin typeface="KoPub돋움체_Pro Medium"/>
-              </a:rPr>
-              <a:t>※ 전 구간 실제값 (수정주가 기준) · KODEX 200/KODEX 레버리지·KODEX SK하이닉스단일종목레버리지(2026.05.27 상장): ETF데이터 · SK하이닉스 주가: DataGuide (2026.08.14 기준) · 상기 자료는 이해를 돕기 위한 예시입니다.</a:t>
-            </a:r>
-          </a:p>
-        </p:txBody>
-      </p:sp>
     </p:spTree>
     <p:extLst>
       <p:ext uri="{BB962C8B-B14F-4D97-AF65-F5344CB8AC3E}">

--- a/제안서/Tech_TOP10_스마트액티브레버리지15_v1_20260812.pptx
+++ b/제안서/Tech_TOP10_스마트액티브레버리지15_v1_20260812.pptx
@@ -24478,7 +24478,7 @@
                 </a:solidFill>
                 <a:latin typeface="KoPub돋움체_Pro Bold"/>
               </a:rPr>
-              <a:t>2. 레버리지 ETF의 특징 ② : 추세 구간 — 복리가 단순 배수보다 유리</a:t>
+              <a:t>2. 레버리지 ETF의 특징 ② : 추세장에서는 오히려 유리하다</a:t>
             </a:r>
           </a:p>
         </p:txBody>
@@ -24516,29 +24516,29 @@
                   <a:srgbClr val="222222"/>
                 </a:solidFill>
               </a:rPr>
-              <a:t>한 방향으로 꾸준한 추세에서는 일별 복리가 유리하게 작동합니다 — 2026.03.31~05.29 KOSPI200 +79.5% 구간에서 단순 2배(+159%)보다 실제 레버리지는 +207%였습니다.</a:t>
+              <a:t>레버리지가 항상 불리한 것은 아닙니다. 한 방향 추세에서는 일별 복리가 유리하게 작동합니다 — 상승 추세에서는 단순 2배보다 더 벌고, 하락 추세에서는 단순 2배보다 덜 잃습니다 (KOSPI200 실측).</a:t>
             </a:r>
           </a:p>
         </p:txBody>
       </p:sp>
       <p:pic>
         <p:nvPicPr>
-          <p:cNvPr id="4" name="Picture 3" descr="image.png"/>
+          <p:cNvPr id="4" name="Picture 3" descr="lev15_trend2.png"/>
           <p:cNvPicPr>
             <a:picLocks noChangeAspect="1"/>
           </p:cNvPicPr>
           <p:nvPr/>
         </p:nvPicPr>
         <p:blipFill>
-          <a:blip r:embed="rId4"/>
+          <a:blip r:embed="rId5"/>
           <a:stretch>
             <a:fillRect/>
           </a:stretch>
         </p:blipFill>
         <p:spPr>
           <a:xfrm>
-            <a:off x="2987040" y="1737360"/>
-            <a:ext cx="3931920" cy="3577570"/>
+            <a:off x="411480" y="1874519"/>
+            <a:ext cx="9098280" cy="2974438"/>
           </a:xfrm>
           <a:prstGeom prst="rect">
             <a:avLst/>
@@ -24553,7 +24553,7 @@
         </p:nvSpPr>
         <p:spPr>
           <a:xfrm>
-            <a:off x="731520" y="5440680"/>
+            <a:off x="731520" y="5349240"/>
             <a:ext cx="8351520" cy="457200"/>
           </a:xfrm>
           <a:prstGeom prst="rect">
@@ -24579,7 +24579,7 @@
                 </a:solidFill>
                 <a:latin typeface="KoPub돋움체_Pro Bold"/>
               </a:rPr>
-              <a:t>추세 구간에서는 복리가 단순 배수보다 유리합니다 — 왕복의 잠식과 추세의 복리, 두 특징 모두 '경로'의 결과입니다.</a:t>
+              <a:t>왕복 구간에는 불리하고, 추세 구간에는 유리합니다 — 방향이 아니라 '경로'가 성과를 결정합니다.</a:t>
             </a:r>
           </a:p>
         </p:txBody>
@@ -24618,7 +24618,7 @@
                 </a:solidFill>
                 <a:latin typeface="KoPub돋움체_Pro Medium"/>
               </a:rPr>
-              <a:t>※ KODEX 200·KODEX 레버리지 수정주가 실측 (2026.03.31~05.29) · 단순 2배 = 기초 누적수익률×2 (가상) · 참고: 2020.03~2021.01 추세 구간에서도 실제 레버리지 +344% vs 단순 2배 +234% · 데이터: ETF데이터</a:t>
+              <a:t>※ ***** 200·***** 레버리지 수정주가 실측 (상승 사례 2026.03.31~05.29, 하락 사례 2022.01.04~10.04) · 단순 2배 = 기초 누적수익률×2 (가상) · 데이터: ETF데이터 · 상기 자료는 이해를 돕기 위한 예시입니다.</a:t>
             </a:r>
           </a:p>
         </p:txBody>

--- a/제안서/Tech_TOP10_스마트액티브레버리지15_v1_20260812.pptx
+++ b/제안서/Tech_TOP10_스마트액티브레버리지15_v1_20260812.pptx
@@ -24693,7 +24693,7 @@
                 </a:solidFill>
                 <a:latin typeface="KoPub돋움체_Pro Bold"/>
               </a:rPr>
-              <a:t>2. 두 특징과 개인의 매매 습성 : 정반대로 움직인다</a:t>
+              <a:t>2. 그러나 레버리지의 장점은 개인의 매매 패턴과 맞지 않는다</a:t>
             </a:r>
           </a:p>
         </p:txBody>
@@ -24731,29 +24731,29 @@
                   <a:srgbClr val="222222"/>
                 </a:solidFill>
               </a:rPr>
-              <a:t>KODEX 레버리지 상장주식수(순증) 실증 — 오르면 팔고, 빠지면 사서 버팁니다. 지수와 주식수 증감의 월간 상관 -0.56 (지수 +2%↑ 월 주식수 평균 -13.3%, -2%↓ 월 +18.8%).</a:t>
+              <a:t>① 상승하면 수익을 확정해 버려(매도) 추세장의 복리 효과를 누리지 못하고, ② 하락하면 지수가 원상복귀될 때까지 버팁니다. 결국 복리는 놓치고 변동성 잠식만 얻습니다 — 레버리지 ETF의 실제 설정(상장주식수)으로 확인됩니다.</a:t>
             </a:r>
           </a:p>
         </p:txBody>
       </p:sp>
       <p:pic>
         <p:nvPicPr>
-          <p:cNvPr id="4" name="Picture 3" descr="image.png"/>
+          <p:cNvPr id="4" name="Picture 3" descr="lev15_flow2.png"/>
           <p:cNvPicPr>
             <a:picLocks noChangeAspect="1"/>
           </p:cNvPicPr>
           <p:nvPr/>
         </p:nvPicPr>
         <p:blipFill>
-          <a:blip r:embed="rId3"/>
+          <a:blip r:embed="rId4"/>
           <a:stretch>
             <a:fillRect/>
           </a:stretch>
         </p:blipFill>
         <p:spPr>
           <a:xfrm>
-            <a:off x="502920" y="1783080"/>
-            <a:ext cx="8900160" cy="3615690"/>
+            <a:off x="411480" y="1828800"/>
+            <a:ext cx="9098280" cy="3061921"/>
           </a:xfrm>
           <a:prstGeom prst="rect">
             <a:avLst/>
@@ -24768,7 +24768,7 @@
         </p:nvSpPr>
         <p:spPr>
           <a:xfrm>
-            <a:off x="731520" y="5440680"/>
+            <a:off x="731520" y="5394960"/>
             <a:ext cx="8351520" cy="457200"/>
           </a:xfrm>
           <a:prstGeom prst="rect">
@@ -24794,7 +24794,7 @@
                 </a:solidFill>
                 <a:latin typeface="KoPub돋움체_Pro Bold"/>
               </a:rPr>
-              <a:t>잠식이 쌓이는 하락·왕복장엔 끝까지 남고, 복리가 쌓이는 추세 상승장(+342%)에선 주식수 -72% — 일찍 떠났습니다.</a:t>
+              <a:t>상승 때는 일찍 팔아 복리를 놓치고, 하락 때는 끝까지 버텨 잠식을 안습니다 — 장점과 정반대로 움직이는 것입니다.</a:t>
             </a:r>
           </a:p>
         </p:txBody>
@@ -24833,7 +24833,7 @@
                 </a:solidFill>
                 <a:latin typeface="KoPub돋움체_Pro Medium"/>
               </a:rPr>
-              <a:t>※ KODEX 레버리지 상장주식수·KODEX 200 수정주가 (2019.01~2026.08) · 상관은 월말 기준 월간 지수수익률 vs 상장주식수 증감률 · 데이터: ETF데이터 · 상기 자료는 이해를 돕기 위한 예시입니다.</a:t>
+              <a:t>※ ***** 레버리지 ETF 상장주식수·***** 200 수정주가 실측 (좌 2025.04.30~2026.06.22, 우 2020.01.02~2021.01.11) · 참고: 월간 지수수익률 vs 주식수 증감률 상관 -0.56 (2019~2026) · 데이터: ETF데이터 · 상기 자료는 이해를 돕기 위한 예시입니다.</a:t>
             </a:r>
           </a:p>
         </p:txBody>

--- a/제안서/Tech_TOP10_스마트액티브레버리지15_v1_20260812.pptx
+++ b/제안서/Tech_TOP10_스마트액티브레버리지15_v1_20260812.pptx
@@ -24092,7 +24092,7 @@
                 </a:solidFill>
                 <a:latin typeface="KoPub돋움체_Pro Medium"/>
               </a:rPr>
-              <a:t>※ ***** 200·***** 레버리지 수정주가 실측 (제자리 사례 2026.02.26~04.16) · '시장 2배 후 제자리 = 0'과 '하루 +10% 후 제자리 = -1.8%'는 2배 레버리지 산술 · 데이터: ETF데이터</a:t>
+              <a:t>※ ***** 200·***** 레버리지 ETF 수정주가 실측 (제자리 사례 2026.02.26~04.16) · '시장 2배 후 제자리 = 0'과 '하루 +10% 후 제자리 = -1.8%'는 2배 레버리지 산술 · 데이터: ETF데이터</a:t>
             </a:r>
           </a:p>
         </p:txBody>
@@ -24130,7 +24130,7 @@
           <p:nvPr/>
         </p:nvPicPr>
         <p:blipFill>
-          <a:blip r:embed="rId8"/>
+          <a:blip r:embed="rId9"/>
           <a:stretch>
             <a:fillRect/>
           </a:stretch>
@@ -24253,7 +24253,7 @@
                   <a:srgbClr val="222222"/>
                 </a:solidFill>
               </a:rPr>
-              <a:t>① KOSPI200이 4년 5개월 걸려 제자리로 왔을 때 레버리지는 -27.1%  ② ***** 하이닉스 레버리지는 출시 6주 뒤 주가 보합(-1.9%)인데 -20.3%  ③ 주가 제자리(+0.3%) 왕복 5주 만에 -15.2%.</a:t>
+              <a:t>① KOSPI200이 4년 5개월 걸려 제자리로 왔을 때 레버리지는 -27.1%  ② ***** 하이닉스 레버리지 ETF는 출시 6주 뒤 주가 보합(-1.9%)인데 -20.3%  ③ 주가 제자리(+0.3%) 왕복 5주 만에 -15.2%.</a:t>
             </a:r>
           </a:p>
         </p:txBody>
@@ -24331,7 +24331,7 @@
                 </a:solidFill>
                 <a:latin typeface="KoPub돋움체_Pro Medium"/>
               </a:rPr>
-              <a:t>※ 전 구간 실제값 (수정주가 기준) · ***** 200/***** 레버리지·***** SK하이닉스단일종목레버리지(2026.05.27 상장): ETF데이터 · SK하이닉스 주가: DataGuide (2026.08.14 기준) · 상기 자료는 이해를 돕기 위한 예시입니다.</a:t>
+              <a:t>※ 전 구간 실제값 (수정주가 기준) · ***** 200/***** 레버리지 ETF·***** SK하이닉스단일종목레버리지(2026.05.27 상장): ETF데이터 · SK하이닉스 주가: DataGuide (2026.08.14 기준) · 상기 자료는 이해를 돕기 위한 예시입니다.</a:t>
             </a:r>
           </a:p>
         </p:txBody>
@@ -24345,7 +24345,7 @@
           <p:nvPr/>
         </p:nvPicPr>
         <p:blipFill>
-          <a:blip r:embed="rId10"/>
+          <a:blip r:embed="rId13"/>
           <a:stretch>
             <a:fillRect/>
           </a:stretch>
@@ -24369,7 +24369,7 @@
           <p:nvPr/>
         </p:nvPicPr>
         <p:blipFill>
-          <a:blip r:embed="rId11"/>
+          <a:blip r:embed="rId14"/>
           <a:stretch>
             <a:fillRect/>
           </a:stretch>
@@ -24393,7 +24393,7 @@
           <p:nvPr/>
         </p:nvPicPr>
         <p:blipFill>
-          <a:blip r:embed="rId12"/>
+          <a:blip r:embed="rId15"/>
           <a:stretch>
             <a:fillRect/>
           </a:stretch>
@@ -24618,7 +24618,7 @@
                 </a:solidFill>
                 <a:latin typeface="KoPub돋움체_Pro Medium"/>
               </a:rPr>
-              <a:t>※ ***** 200·***** 레버리지 수정주가 실측 (상승 사례 2026.03.31~05.29, 하락 사례 2022.01.04~10.04) · 단순 2배 = 기초 누적수익률×2 (가상) · 데이터: ETF데이터 · 상기 자료는 이해를 돕기 위한 예시입니다.</a:t>
+              <a:t>※ ***** 200·***** 레버리지 ETF 수정주가 실측 (상승 사례 2026.03.31~05.29, 하락 사례 2022.01.04~10.04) · 단순 2배 = 기초 누적수익률×2 (가상) · 데이터: ETF데이터 · 상기 자료는 이해를 돕기 위한 예시입니다.</a:t>
             </a:r>
           </a:p>
         </p:txBody>

--- a/제안서/Tech_TOP10_스마트액티브레버리지15_v1_20260812.pptx
+++ b/제안서/Tech_TOP10_스마트액티브레버리지15_v1_20260812.pptx
@@ -24745,30 +24745,466 @@
           <p:nvPr/>
         </p:nvPicPr>
         <p:blipFill>
-          <a:blip r:embed="rId4"/>
+          <a:blip r:embed="rId5"/>
           <a:stretch>
             <a:fillRect/>
           </a:stretch>
         </p:blipFill>
         <p:spPr>
           <a:xfrm>
-            <a:off x="411480" y="1828800"/>
-            <a:ext cx="9098280" cy="3061921"/>
+            <a:off x="411480" y="1737360"/>
+            <a:ext cx="9098280" cy="2711987"/>
           </a:xfrm>
           <a:prstGeom prst="rect">
             <a:avLst/>
           </a:prstGeom>
         </p:spPr>
       </p:pic>
+      <p:graphicFrame>
+        <p:nvGraphicFramePr>
+          <p:cNvPr id="5" name="Table 4"/>
+          <p:cNvGraphicFramePr>
+            <a:graphicFrameLocks noGrp="1"/>
+          </p:cNvGraphicFramePr>
+          <p:nvPr/>
+        </p:nvGraphicFramePr>
+        <p:xfrm>
+          <a:off x="685800" y="4590288"/>
+          <a:ext cx="4160519" cy="1133856"/>
+        </p:xfrm>
+        <a:graphic>
+          <a:graphicData uri="http://schemas.openxmlformats.org/drawingml/2006/table">
+            <a:tbl>
+              <a:tblPr firstRow="1" bandRow="1">
+                <a:tableStyleId>{5C22544A-7EE6-4342-B048-85BDC9FD1C3A}</a:tableStyleId>
+              </a:tblPr>
+              <a:tblGrid>
+                <a:gridCol w="2163470"/>
+                <a:gridCol w="1997049"/>
+              </a:tblGrid>
+              <a:tr h="283464">
+                <a:tc>
+                  <a:txBody>
+                    <a:bodyPr/>
+                    <a:lstStyle/>
+                    <a:p>
+                      <a:pPr/>
+                      <a:r>
+                        <a:rPr sz="1000" b="1">
+                          <a:solidFill>
+                            <a:srgbClr val="FFFFFF"/>
+                          </a:solidFill>
+                          <a:latin typeface="KoPub돋움체_Pro Bold"/>
+                        </a:rPr>
+                        <a:t>KOSPI200</a:t>
+                      </a:r>
+                    </a:p>
+                  </a:txBody>
+                  <a:tcPr>
+                    <a:solidFill>
+                      <a:srgbClr val="043B72"/>
+                    </a:solidFill>
+                  </a:tcPr>
+                </a:tc>
+                <a:tc>
+                  <a:txBody>
+                    <a:bodyPr/>
+                    <a:lstStyle/>
+                    <a:p>
+                      <a:pPr/>
+                      <a:r>
+                        <a:rPr sz="1000" b="0">
+                          <a:solidFill>
+                            <a:srgbClr val="222222"/>
+                          </a:solidFill>
+                          <a:latin typeface="KoPub돋움체_Pro Medium"/>
+                        </a:rPr>
+                        <a:t>+342%</a:t>
+                      </a:r>
+                    </a:p>
+                  </a:txBody>
+                  <a:tcPr>
+                    <a:solidFill>
+                      <a:srgbClr val="FFFFFF"/>
+                    </a:solidFill>
+                  </a:tcPr>
+                </a:tc>
+              </a:tr>
+              <a:tr h="283464">
+                <a:tc>
+                  <a:txBody>
+                    <a:bodyPr/>
+                    <a:lstStyle/>
+                    <a:p>
+                      <a:pPr/>
+                      <a:r>
+                        <a:rPr sz="1000" b="1">
+                          <a:solidFill>
+                            <a:srgbClr val="FFFFFF"/>
+                          </a:solidFill>
+                          <a:latin typeface="KoPub돋움체_Pro Bold"/>
+                        </a:rPr>
+                        <a:t>단순 2배 (가상)</a:t>
+                      </a:r>
+                    </a:p>
+                  </a:txBody>
+                  <a:tcPr>
+                    <a:solidFill>
+                      <a:srgbClr val="043B72"/>
+                    </a:solidFill>
+                  </a:tcPr>
+                </a:tc>
+                <a:tc>
+                  <a:txBody>
+                    <a:bodyPr/>
+                    <a:lstStyle/>
+                    <a:p>
+                      <a:pPr/>
+                      <a:r>
+                        <a:rPr sz="1000" b="0">
+                          <a:solidFill>
+                            <a:srgbClr val="222222"/>
+                          </a:solidFill>
+                          <a:latin typeface="KoPub돋움체_Pro Medium"/>
+                        </a:rPr>
+                        <a:t>+685%</a:t>
+                      </a:r>
+                    </a:p>
+                  </a:txBody>
+                  <a:tcPr>
+                    <a:solidFill>
+                      <a:srgbClr val="F8FAFC"/>
+                    </a:solidFill>
+                  </a:tcPr>
+                </a:tc>
+              </a:tr>
+              <a:tr h="283464">
+                <a:tc>
+                  <a:txBody>
+                    <a:bodyPr/>
+                    <a:lstStyle/>
+                    <a:p>
+                      <a:pPr/>
+                      <a:r>
+                        <a:rPr sz="1000" b="1">
+                          <a:solidFill>
+                            <a:srgbClr val="FFFFFF"/>
+                          </a:solidFill>
+                          <a:latin typeface="KoPub돋움체_Pro Bold"/>
+                        </a:rPr>
+                        <a:t>***** 레버리지 ETF (실제)</a:t>
+                      </a:r>
+                    </a:p>
+                  </a:txBody>
+                  <a:tcPr>
+                    <a:solidFill>
+                      <a:srgbClr val="043B72"/>
+                    </a:solidFill>
+                  </a:tcPr>
+                </a:tc>
+                <a:tc>
+                  <a:txBody>
+                    <a:bodyPr/>
+                    <a:lstStyle/>
+                    <a:p>
+                      <a:pPr/>
+                      <a:r>
+                        <a:rPr sz="1000" b="0">
+                          <a:solidFill>
+                            <a:srgbClr val="222222"/>
+                          </a:solidFill>
+                          <a:latin typeface="KoPub돋움체_Pro Medium"/>
+                        </a:rPr>
+                        <a:t>+1,437%</a:t>
+                      </a:r>
+                    </a:p>
+                  </a:txBody>
+                  <a:tcPr>
+                    <a:solidFill>
+                      <a:srgbClr val="FFFFFF"/>
+                    </a:solidFill>
+                  </a:tcPr>
+                </a:tc>
+              </a:tr>
+              <a:tr h="283464">
+                <a:tc>
+                  <a:txBody>
+                    <a:bodyPr/>
+                    <a:lstStyle/>
+                    <a:p>
+                      <a:pPr/>
+                      <a:r>
+                        <a:rPr sz="1000" b="1">
+                          <a:solidFill>
+                            <a:srgbClr val="FFFFFF"/>
+                          </a:solidFill>
+                          <a:latin typeface="KoPub돋움체_Pro Bold"/>
+                        </a:rPr>
+                        <a:t>상장주식수</a:t>
+                      </a:r>
+                    </a:p>
+                  </a:txBody>
+                  <a:tcPr>
+                    <a:solidFill>
+                      <a:srgbClr val="043B72"/>
+                    </a:solidFill>
+                  </a:tcPr>
+                </a:tc>
+                <a:tc>
+                  <a:txBody>
+                    <a:bodyPr/>
+                    <a:lstStyle/>
+                    <a:p>
+                      <a:pPr/>
+                      <a:r>
+                        <a:rPr sz="1000" b="1">
+                          <a:solidFill>
+                            <a:srgbClr val="C0392B"/>
+                          </a:solidFill>
+                          <a:latin typeface="KoPub돋움체_Pro Bold"/>
+                        </a:rPr>
+                        <a:t>173 → 48백만주 (-72%)</a:t>
+                      </a:r>
+                    </a:p>
+                  </a:txBody>
+                  <a:tcPr>
+                    <a:solidFill>
+                      <a:srgbClr val="F8FAFC"/>
+                    </a:solidFill>
+                  </a:tcPr>
+                </a:tc>
+              </a:tr>
+            </a:tbl>
+          </a:graphicData>
+        </a:graphic>
+      </p:graphicFrame>
+      <p:graphicFrame>
+        <p:nvGraphicFramePr>
+          <p:cNvPr id="6" name="Table 5"/>
+          <p:cNvGraphicFramePr>
+            <a:graphicFrameLocks noGrp="1"/>
+          </p:cNvGraphicFramePr>
+          <p:nvPr/>
+        </p:nvGraphicFramePr>
+        <p:xfrm>
+          <a:off x="5074920" y="4590288"/>
+          <a:ext cx="4160519" cy="1133856"/>
+        </p:xfrm>
+        <a:graphic>
+          <a:graphicData uri="http://schemas.openxmlformats.org/drawingml/2006/table">
+            <a:tbl>
+              <a:tblPr firstRow="1" bandRow="1">
+                <a:tableStyleId>{5C22544A-7EE6-4342-B048-85BDC9FD1C3A}</a:tableStyleId>
+              </a:tblPr>
+              <a:tblGrid>
+                <a:gridCol w="2163470"/>
+                <a:gridCol w="1997049"/>
+              </a:tblGrid>
+              <a:tr h="283464">
+                <a:tc>
+                  <a:txBody>
+                    <a:bodyPr/>
+                    <a:lstStyle/>
+                    <a:p>
+                      <a:pPr/>
+                      <a:r>
+                        <a:rPr sz="1000" b="1">
+                          <a:solidFill>
+                            <a:srgbClr val="FFFFFF"/>
+                          </a:solidFill>
+                          <a:latin typeface="KoPub돋움체_Pro Bold"/>
+                        </a:rPr>
+                        <a:t>KOSPI200</a:t>
+                      </a:r>
+                    </a:p>
+                  </a:txBody>
+                  <a:tcPr>
+                    <a:solidFill>
+                      <a:srgbClr val="043B72"/>
+                    </a:solidFill>
+                  </a:tcPr>
+                </a:tc>
+                <a:tc>
+                  <a:txBody>
+                    <a:bodyPr/>
+                    <a:lstStyle/>
+                    <a:p>
+                      <a:pPr/>
+                      <a:r>
+                        <a:rPr sz="1000" b="0">
+                          <a:solidFill>
+                            <a:srgbClr val="222222"/>
+                          </a:solidFill>
+                          <a:latin typeface="KoPub돋움체_Pro Medium"/>
+                        </a:rPr>
+                        <a:t>+6.5% (복귀·상회)</a:t>
+                      </a:r>
+                    </a:p>
+                  </a:txBody>
+                  <a:tcPr>
+                    <a:solidFill>
+                      <a:srgbClr val="FFFFFF"/>
+                    </a:solidFill>
+                  </a:tcPr>
+                </a:tc>
+              </a:tr>
+              <a:tr h="283464">
+                <a:tc>
+                  <a:txBody>
+                    <a:bodyPr/>
+                    <a:lstStyle/>
+                    <a:p>
+                      <a:pPr/>
+                      <a:r>
+                        <a:rPr sz="1000" b="1">
+                          <a:solidFill>
+                            <a:srgbClr val="FFFFFF"/>
+                          </a:solidFill>
+                          <a:latin typeface="KoPub돋움체_Pro Bold"/>
+                        </a:rPr>
+                        <a:t>단순 2배 (가상)</a:t>
+                      </a:r>
+                    </a:p>
+                  </a:txBody>
+                  <a:tcPr>
+                    <a:solidFill>
+                      <a:srgbClr val="043B72"/>
+                    </a:solidFill>
+                  </a:tcPr>
+                </a:tc>
+                <a:tc>
+                  <a:txBody>
+                    <a:bodyPr/>
+                    <a:lstStyle/>
+                    <a:p>
+                      <a:pPr/>
+                      <a:r>
+                        <a:rPr sz="1000" b="0">
+                          <a:solidFill>
+                            <a:srgbClr val="222222"/>
+                          </a:solidFill>
+                          <a:latin typeface="KoPub돋움체_Pro Medium"/>
+                        </a:rPr>
+                        <a:t>+12.9%</a:t>
+                      </a:r>
+                    </a:p>
+                  </a:txBody>
+                  <a:tcPr>
+                    <a:solidFill>
+                      <a:srgbClr val="F8FAFC"/>
+                    </a:solidFill>
+                  </a:tcPr>
+                </a:tc>
+              </a:tr>
+              <a:tr h="283464">
+                <a:tc>
+                  <a:txBody>
+                    <a:bodyPr/>
+                    <a:lstStyle/>
+                    <a:p>
+                      <a:pPr/>
+                      <a:r>
+                        <a:rPr sz="1000" b="1">
+                          <a:solidFill>
+                            <a:srgbClr val="FFFFFF"/>
+                          </a:solidFill>
+                          <a:latin typeface="KoPub돋움체_Pro Bold"/>
+                        </a:rPr>
+                        <a:t>***** 레버리지 ETF (실제)</a:t>
+                      </a:r>
+                    </a:p>
+                  </a:txBody>
+                  <a:tcPr>
+                    <a:solidFill>
+                      <a:srgbClr val="043B72"/>
+                    </a:solidFill>
+                  </a:tcPr>
+                </a:tc>
+                <a:tc>
+                  <a:txBody>
+                    <a:bodyPr/>
+                    <a:lstStyle/>
+                    <a:p>
+                      <a:pPr/>
+                      <a:r>
+                        <a:rPr sz="1000" b="1">
+                          <a:solidFill>
+                            <a:srgbClr val="C0392B"/>
+                          </a:solidFill>
+                          <a:latin typeface="KoPub돋움체_Pro Bold"/>
+                        </a:rPr>
+                        <a:t>+3.0% (잠식 -9.9%p)</a:t>
+                      </a:r>
+                    </a:p>
+                  </a:txBody>
+                  <a:tcPr>
+                    <a:solidFill>
+                      <a:srgbClr val="FFFFFF"/>
+                    </a:solidFill>
+                  </a:tcPr>
+                </a:tc>
+              </a:tr>
+              <a:tr h="283464">
+                <a:tc>
+                  <a:txBody>
+                    <a:bodyPr/>
+                    <a:lstStyle/>
+                    <a:p>
+                      <a:pPr/>
+                      <a:r>
+                        <a:rPr sz="1000" b="1">
+                          <a:solidFill>
+                            <a:srgbClr val="FFFFFF"/>
+                          </a:solidFill>
+                          <a:latin typeface="KoPub돋움체_Pro Bold"/>
+                        </a:rPr>
+                        <a:t>상장주식수</a:t>
+                      </a:r>
+                    </a:p>
+                  </a:txBody>
+                  <a:tcPr>
+                    <a:solidFill>
+                      <a:srgbClr val="043B72"/>
+                    </a:solidFill>
+                  </a:tcPr>
+                </a:tc>
+                <a:tc>
+                  <a:txBody>
+                    <a:bodyPr/>
+                    <a:lstStyle/>
+                    <a:p>
+                      <a:pPr/>
+                      <a:r>
+                        <a:rPr sz="1000" b="0">
+                          <a:solidFill>
+                            <a:srgbClr val="222222"/>
+                          </a:solidFill>
+                          <a:latin typeface="KoPub돋움체_Pro Medium"/>
+                        </a:rPr>
+                        <a:t>155 → 427 → 156백만주</a:t>
+                      </a:r>
+                    </a:p>
+                  </a:txBody>
+                  <a:tcPr>
+                    <a:solidFill>
+                      <a:srgbClr val="F8FAFC"/>
+                    </a:solidFill>
+                  </a:tcPr>
+                </a:tc>
+              </a:tr>
+            </a:tbl>
+          </a:graphicData>
+        </a:graphic>
+      </p:graphicFrame>
       <p:sp>
         <p:nvSpPr>
-          <p:cNvPr id="5" name="TextBox 4"/>
+          <p:cNvPr id="7" name="TextBox 6"/>
           <p:cNvSpPr txBox="1"/>
           <p:nvPr/>
         </p:nvSpPr>
         <p:spPr>
           <a:xfrm>
-            <a:off x="731520" y="5394960"/>
+            <a:off x="731520" y="5852160"/>
             <a:ext cx="8351520" cy="457200"/>
           </a:xfrm>
           <a:prstGeom prst="rect">
@@ -24788,20 +25224,20 @@
               </a:lnSpc>
             </a:pPr>
             <a:r>
-              <a:rPr sz="1400" b="1">
+              <a:rPr sz="1300" b="1">
                 <a:solidFill>
                   <a:srgbClr val="E8720C"/>
                 </a:solidFill>
                 <a:latin typeface="KoPub돋움체_Pro Bold"/>
               </a:rPr>
-              <a:t>상승 때는 일찍 팔아 복리를 놓치고, 하락 때는 끝까지 버텨 잠식을 안습니다 — 장점과 정반대로 움직이는 것입니다.</a:t>
+              <a:t>상승 때는 +1,437%를 두고 일찍 떠났고, 하락 때는 버텨서 잠식만 얻었습니다 — 장점과 정반대로 움직이는 것입니다.</a:t>
             </a:r>
           </a:p>
         </p:txBody>
       </p:sp>
       <p:sp>
         <p:nvSpPr>
-          <p:cNvPr id="6" name="TextBox 5"/>
+          <p:cNvPr id="8" name="TextBox 7"/>
           <p:cNvSpPr txBox="1"/>
           <p:nvPr/>
         </p:nvSpPr>
@@ -24833,7 +25269,7 @@
                 </a:solidFill>
                 <a:latin typeface="KoPub돋움체_Pro Medium"/>
               </a:rPr>
-              <a:t>※ ***** 레버리지 ETF 상장주식수·***** 200 수정주가 실측 (좌 2025.04.30~2026.06.22, 우 2020.01.02~2021.01.11) · 참고: 월간 지수수익률 vs 주식수 증감률 상관 -0.56 (2019~2026) · 데이터: ETF데이터 · 상기 자료는 이해를 돕기 위한 예시입니다.</a:t>
+              <a:t>※ ***** 레버리지 ETF 상장주식수·수정주가, ***** 200 ETF 수정주가 실측 (좌 2025.04.30~2026.06.22, 우 2020.01.02~2020.08.31) · 단순 2배 = 지수 누적수익률×2 (가상) · 참고: 월간 지수수익률 vs 주식수 증감률 상관 -0.56 (2019~2026) · 데이터: ETF데이터</a:t>
             </a:r>
           </a:p>
         </p:txBody>

--- a/제안서/Tech_TOP10_스마트액티브레버리지15_v1_20260812.pptx
+++ b/제안서/Tech_TOP10_스마트액티브레버리지15_v1_20260812.pptx
@@ -24731,7 +24731,7 @@
                   <a:srgbClr val="222222"/>
                 </a:solidFill>
               </a:rPr>
-              <a:t>① 상승하면 수익을 확정해 버려(매도) 추세장의 복리 효과를 누리지 못하고, ② 하락하면 지수가 원상복귀될 때까지 버팁니다. 결국 복리는 놓치고 변동성 잠식만 얻습니다 — 레버리지 ETF의 실제 설정(상장주식수)으로 확인됩니다.</a:t>
+              <a:t>① 상승하면 수익을 확정해 버려(매도) 추세장의 복리 효과를 누리지 못하고, ② 하락하면 지수가 원상복귀될 때까지 버팁니다. 결국 복리는 놓치고 변동성 잠식만 얻습니다 — 레버리지 ETF의 실제 설정(상장주식수)과 수익률로 확인됩니다.</a:t>
             </a:r>
           </a:p>
         </p:txBody>
@@ -24745,466 +24745,30 @@
           <p:nvPr/>
         </p:nvPicPr>
         <p:blipFill>
-          <a:blip r:embed="rId5"/>
+          <a:blip r:embed="rId8"/>
           <a:stretch>
             <a:fillRect/>
           </a:stretch>
         </p:blipFill>
         <p:spPr>
           <a:xfrm>
-            <a:off x="411480" y="1737360"/>
-            <a:ext cx="9098280" cy="2711987"/>
+            <a:off x="411480" y="1810512"/>
+            <a:ext cx="9098280" cy="3061921"/>
           </a:xfrm>
           <a:prstGeom prst="rect">
             <a:avLst/>
           </a:prstGeom>
         </p:spPr>
       </p:pic>
-      <p:graphicFrame>
-        <p:nvGraphicFramePr>
-          <p:cNvPr id="5" name="Table 4"/>
-          <p:cNvGraphicFramePr>
-            <a:graphicFrameLocks noGrp="1"/>
-          </p:cNvGraphicFramePr>
-          <p:nvPr/>
-        </p:nvGraphicFramePr>
-        <p:xfrm>
-          <a:off x="685800" y="4590288"/>
-          <a:ext cx="4160519" cy="1133856"/>
-        </p:xfrm>
-        <a:graphic>
-          <a:graphicData uri="http://schemas.openxmlformats.org/drawingml/2006/table">
-            <a:tbl>
-              <a:tblPr firstRow="1" bandRow="1">
-                <a:tableStyleId>{5C22544A-7EE6-4342-B048-85BDC9FD1C3A}</a:tableStyleId>
-              </a:tblPr>
-              <a:tblGrid>
-                <a:gridCol w="2163470"/>
-                <a:gridCol w="1997049"/>
-              </a:tblGrid>
-              <a:tr h="283464">
-                <a:tc>
-                  <a:txBody>
-                    <a:bodyPr/>
-                    <a:lstStyle/>
-                    <a:p>
-                      <a:pPr/>
-                      <a:r>
-                        <a:rPr sz="1000" b="1">
-                          <a:solidFill>
-                            <a:srgbClr val="FFFFFF"/>
-                          </a:solidFill>
-                          <a:latin typeface="KoPub돋움체_Pro Bold"/>
-                        </a:rPr>
-                        <a:t>KOSPI200</a:t>
-                      </a:r>
-                    </a:p>
-                  </a:txBody>
-                  <a:tcPr>
-                    <a:solidFill>
-                      <a:srgbClr val="043B72"/>
-                    </a:solidFill>
-                  </a:tcPr>
-                </a:tc>
-                <a:tc>
-                  <a:txBody>
-                    <a:bodyPr/>
-                    <a:lstStyle/>
-                    <a:p>
-                      <a:pPr/>
-                      <a:r>
-                        <a:rPr sz="1000" b="0">
-                          <a:solidFill>
-                            <a:srgbClr val="222222"/>
-                          </a:solidFill>
-                          <a:latin typeface="KoPub돋움체_Pro Medium"/>
-                        </a:rPr>
-                        <a:t>+342%</a:t>
-                      </a:r>
-                    </a:p>
-                  </a:txBody>
-                  <a:tcPr>
-                    <a:solidFill>
-                      <a:srgbClr val="FFFFFF"/>
-                    </a:solidFill>
-                  </a:tcPr>
-                </a:tc>
-              </a:tr>
-              <a:tr h="283464">
-                <a:tc>
-                  <a:txBody>
-                    <a:bodyPr/>
-                    <a:lstStyle/>
-                    <a:p>
-                      <a:pPr/>
-                      <a:r>
-                        <a:rPr sz="1000" b="1">
-                          <a:solidFill>
-                            <a:srgbClr val="FFFFFF"/>
-                          </a:solidFill>
-                          <a:latin typeface="KoPub돋움체_Pro Bold"/>
-                        </a:rPr>
-                        <a:t>단순 2배 (가상)</a:t>
-                      </a:r>
-                    </a:p>
-                  </a:txBody>
-                  <a:tcPr>
-                    <a:solidFill>
-                      <a:srgbClr val="043B72"/>
-                    </a:solidFill>
-                  </a:tcPr>
-                </a:tc>
-                <a:tc>
-                  <a:txBody>
-                    <a:bodyPr/>
-                    <a:lstStyle/>
-                    <a:p>
-                      <a:pPr/>
-                      <a:r>
-                        <a:rPr sz="1000" b="0">
-                          <a:solidFill>
-                            <a:srgbClr val="222222"/>
-                          </a:solidFill>
-                          <a:latin typeface="KoPub돋움체_Pro Medium"/>
-                        </a:rPr>
-                        <a:t>+685%</a:t>
-                      </a:r>
-                    </a:p>
-                  </a:txBody>
-                  <a:tcPr>
-                    <a:solidFill>
-                      <a:srgbClr val="F8FAFC"/>
-                    </a:solidFill>
-                  </a:tcPr>
-                </a:tc>
-              </a:tr>
-              <a:tr h="283464">
-                <a:tc>
-                  <a:txBody>
-                    <a:bodyPr/>
-                    <a:lstStyle/>
-                    <a:p>
-                      <a:pPr/>
-                      <a:r>
-                        <a:rPr sz="1000" b="1">
-                          <a:solidFill>
-                            <a:srgbClr val="FFFFFF"/>
-                          </a:solidFill>
-                          <a:latin typeface="KoPub돋움체_Pro Bold"/>
-                        </a:rPr>
-                        <a:t>***** 레버리지 ETF (실제)</a:t>
-                      </a:r>
-                    </a:p>
-                  </a:txBody>
-                  <a:tcPr>
-                    <a:solidFill>
-                      <a:srgbClr val="043B72"/>
-                    </a:solidFill>
-                  </a:tcPr>
-                </a:tc>
-                <a:tc>
-                  <a:txBody>
-                    <a:bodyPr/>
-                    <a:lstStyle/>
-                    <a:p>
-                      <a:pPr/>
-                      <a:r>
-                        <a:rPr sz="1000" b="0">
-                          <a:solidFill>
-                            <a:srgbClr val="222222"/>
-                          </a:solidFill>
-                          <a:latin typeface="KoPub돋움체_Pro Medium"/>
-                        </a:rPr>
-                        <a:t>+1,437%</a:t>
-                      </a:r>
-                    </a:p>
-                  </a:txBody>
-                  <a:tcPr>
-                    <a:solidFill>
-                      <a:srgbClr val="FFFFFF"/>
-                    </a:solidFill>
-                  </a:tcPr>
-                </a:tc>
-              </a:tr>
-              <a:tr h="283464">
-                <a:tc>
-                  <a:txBody>
-                    <a:bodyPr/>
-                    <a:lstStyle/>
-                    <a:p>
-                      <a:pPr/>
-                      <a:r>
-                        <a:rPr sz="1000" b="1">
-                          <a:solidFill>
-                            <a:srgbClr val="FFFFFF"/>
-                          </a:solidFill>
-                          <a:latin typeface="KoPub돋움체_Pro Bold"/>
-                        </a:rPr>
-                        <a:t>상장주식수</a:t>
-                      </a:r>
-                    </a:p>
-                  </a:txBody>
-                  <a:tcPr>
-                    <a:solidFill>
-                      <a:srgbClr val="043B72"/>
-                    </a:solidFill>
-                  </a:tcPr>
-                </a:tc>
-                <a:tc>
-                  <a:txBody>
-                    <a:bodyPr/>
-                    <a:lstStyle/>
-                    <a:p>
-                      <a:pPr/>
-                      <a:r>
-                        <a:rPr sz="1000" b="1">
-                          <a:solidFill>
-                            <a:srgbClr val="C0392B"/>
-                          </a:solidFill>
-                          <a:latin typeface="KoPub돋움체_Pro Bold"/>
-                        </a:rPr>
-                        <a:t>173 → 48백만주 (-72%)</a:t>
-                      </a:r>
-                    </a:p>
-                  </a:txBody>
-                  <a:tcPr>
-                    <a:solidFill>
-                      <a:srgbClr val="F8FAFC"/>
-                    </a:solidFill>
-                  </a:tcPr>
-                </a:tc>
-              </a:tr>
-            </a:tbl>
-          </a:graphicData>
-        </a:graphic>
-      </p:graphicFrame>
-      <p:graphicFrame>
-        <p:nvGraphicFramePr>
-          <p:cNvPr id="6" name="Table 5"/>
-          <p:cNvGraphicFramePr>
-            <a:graphicFrameLocks noGrp="1"/>
-          </p:cNvGraphicFramePr>
-          <p:nvPr/>
-        </p:nvGraphicFramePr>
-        <p:xfrm>
-          <a:off x="5074920" y="4590288"/>
-          <a:ext cx="4160519" cy="1133856"/>
-        </p:xfrm>
-        <a:graphic>
-          <a:graphicData uri="http://schemas.openxmlformats.org/drawingml/2006/table">
-            <a:tbl>
-              <a:tblPr firstRow="1" bandRow="1">
-                <a:tableStyleId>{5C22544A-7EE6-4342-B048-85BDC9FD1C3A}</a:tableStyleId>
-              </a:tblPr>
-              <a:tblGrid>
-                <a:gridCol w="2163470"/>
-                <a:gridCol w="1997049"/>
-              </a:tblGrid>
-              <a:tr h="283464">
-                <a:tc>
-                  <a:txBody>
-                    <a:bodyPr/>
-                    <a:lstStyle/>
-                    <a:p>
-                      <a:pPr/>
-                      <a:r>
-                        <a:rPr sz="1000" b="1">
-                          <a:solidFill>
-                            <a:srgbClr val="FFFFFF"/>
-                          </a:solidFill>
-                          <a:latin typeface="KoPub돋움체_Pro Bold"/>
-                        </a:rPr>
-                        <a:t>KOSPI200</a:t>
-                      </a:r>
-                    </a:p>
-                  </a:txBody>
-                  <a:tcPr>
-                    <a:solidFill>
-                      <a:srgbClr val="043B72"/>
-                    </a:solidFill>
-                  </a:tcPr>
-                </a:tc>
-                <a:tc>
-                  <a:txBody>
-                    <a:bodyPr/>
-                    <a:lstStyle/>
-                    <a:p>
-                      <a:pPr/>
-                      <a:r>
-                        <a:rPr sz="1000" b="0">
-                          <a:solidFill>
-                            <a:srgbClr val="222222"/>
-                          </a:solidFill>
-                          <a:latin typeface="KoPub돋움체_Pro Medium"/>
-                        </a:rPr>
-                        <a:t>+6.5% (복귀·상회)</a:t>
-                      </a:r>
-                    </a:p>
-                  </a:txBody>
-                  <a:tcPr>
-                    <a:solidFill>
-                      <a:srgbClr val="FFFFFF"/>
-                    </a:solidFill>
-                  </a:tcPr>
-                </a:tc>
-              </a:tr>
-              <a:tr h="283464">
-                <a:tc>
-                  <a:txBody>
-                    <a:bodyPr/>
-                    <a:lstStyle/>
-                    <a:p>
-                      <a:pPr/>
-                      <a:r>
-                        <a:rPr sz="1000" b="1">
-                          <a:solidFill>
-                            <a:srgbClr val="FFFFFF"/>
-                          </a:solidFill>
-                          <a:latin typeface="KoPub돋움체_Pro Bold"/>
-                        </a:rPr>
-                        <a:t>단순 2배 (가상)</a:t>
-                      </a:r>
-                    </a:p>
-                  </a:txBody>
-                  <a:tcPr>
-                    <a:solidFill>
-                      <a:srgbClr val="043B72"/>
-                    </a:solidFill>
-                  </a:tcPr>
-                </a:tc>
-                <a:tc>
-                  <a:txBody>
-                    <a:bodyPr/>
-                    <a:lstStyle/>
-                    <a:p>
-                      <a:pPr/>
-                      <a:r>
-                        <a:rPr sz="1000" b="0">
-                          <a:solidFill>
-                            <a:srgbClr val="222222"/>
-                          </a:solidFill>
-                          <a:latin typeface="KoPub돋움체_Pro Medium"/>
-                        </a:rPr>
-                        <a:t>+12.9%</a:t>
-                      </a:r>
-                    </a:p>
-                  </a:txBody>
-                  <a:tcPr>
-                    <a:solidFill>
-                      <a:srgbClr val="F8FAFC"/>
-                    </a:solidFill>
-                  </a:tcPr>
-                </a:tc>
-              </a:tr>
-              <a:tr h="283464">
-                <a:tc>
-                  <a:txBody>
-                    <a:bodyPr/>
-                    <a:lstStyle/>
-                    <a:p>
-                      <a:pPr/>
-                      <a:r>
-                        <a:rPr sz="1000" b="1">
-                          <a:solidFill>
-                            <a:srgbClr val="FFFFFF"/>
-                          </a:solidFill>
-                          <a:latin typeface="KoPub돋움체_Pro Bold"/>
-                        </a:rPr>
-                        <a:t>***** 레버리지 ETF (실제)</a:t>
-                      </a:r>
-                    </a:p>
-                  </a:txBody>
-                  <a:tcPr>
-                    <a:solidFill>
-                      <a:srgbClr val="043B72"/>
-                    </a:solidFill>
-                  </a:tcPr>
-                </a:tc>
-                <a:tc>
-                  <a:txBody>
-                    <a:bodyPr/>
-                    <a:lstStyle/>
-                    <a:p>
-                      <a:pPr/>
-                      <a:r>
-                        <a:rPr sz="1000" b="1">
-                          <a:solidFill>
-                            <a:srgbClr val="C0392B"/>
-                          </a:solidFill>
-                          <a:latin typeface="KoPub돋움체_Pro Bold"/>
-                        </a:rPr>
-                        <a:t>+3.0% (잠식 -9.9%p)</a:t>
-                      </a:r>
-                    </a:p>
-                  </a:txBody>
-                  <a:tcPr>
-                    <a:solidFill>
-                      <a:srgbClr val="FFFFFF"/>
-                    </a:solidFill>
-                  </a:tcPr>
-                </a:tc>
-              </a:tr>
-              <a:tr h="283464">
-                <a:tc>
-                  <a:txBody>
-                    <a:bodyPr/>
-                    <a:lstStyle/>
-                    <a:p>
-                      <a:pPr/>
-                      <a:r>
-                        <a:rPr sz="1000" b="1">
-                          <a:solidFill>
-                            <a:srgbClr val="FFFFFF"/>
-                          </a:solidFill>
-                          <a:latin typeface="KoPub돋움체_Pro Bold"/>
-                        </a:rPr>
-                        <a:t>상장주식수</a:t>
-                      </a:r>
-                    </a:p>
-                  </a:txBody>
-                  <a:tcPr>
-                    <a:solidFill>
-                      <a:srgbClr val="043B72"/>
-                    </a:solidFill>
-                  </a:tcPr>
-                </a:tc>
-                <a:tc>
-                  <a:txBody>
-                    <a:bodyPr/>
-                    <a:lstStyle/>
-                    <a:p>
-                      <a:pPr/>
-                      <a:r>
-                        <a:rPr sz="1000" b="0">
-                          <a:solidFill>
-                            <a:srgbClr val="222222"/>
-                          </a:solidFill>
-                          <a:latin typeface="KoPub돋움체_Pro Medium"/>
-                        </a:rPr>
-                        <a:t>155 → 427 → 156백만주</a:t>
-                      </a:r>
-                    </a:p>
-                  </a:txBody>
-                  <a:tcPr>
-                    <a:solidFill>
-                      <a:srgbClr val="F8FAFC"/>
-                    </a:solidFill>
-                  </a:tcPr>
-                </a:tc>
-              </a:tr>
-            </a:tbl>
-          </a:graphicData>
-        </a:graphic>
-      </p:graphicFrame>
-      <p:sp>
-        <p:nvSpPr>
-          <p:cNvPr id="7" name="TextBox 6"/>
+      <p:sp>
+        <p:nvSpPr>
+          <p:cNvPr id="5" name="TextBox 4"/>
           <p:cNvSpPr txBox="1"/>
           <p:nvPr/>
         </p:nvSpPr>
         <p:spPr>
           <a:xfrm>
-            <a:off x="731520" y="5852160"/>
+            <a:off x="731520" y="5440680"/>
             <a:ext cx="8351520" cy="457200"/>
           </a:xfrm>
           <a:prstGeom prst="rect">
@@ -25224,7 +24788,7 @@
               </a:lnSpc>
             </a:pPr>
             <a:r>
-              <a:rPr sz="1300" b="1">
+              <a:rPr sz="1350" b="1">
                 <a:solidFill>
                   <a:srgbClr val="E8720C"/>
                 </a:solidFill>
@@ -25237,7 +24801,7 @@
       </p:sp>
       <p:sp>
         <p:nvSpPr>
-          <p:cNvPr id="8" name="TextBox 7"/>
+          <p:cNvPr id="6" name="TextBox 5"/>
           <p:cNvSpPr txBox="1"/>
           <p:nvPr/>
         </p:nvSpPr>
